--- a/ARAH-System-Overview.pptx
+++ b/ARAH-System-Overview.pptx
@@ -14672,7 +14672,7 @@
                 <a:ea typeface="Consolas" pitchFamily="34" charset="-122"/>
                 <a:cs typeface="Consolas" pitchFamily="34" charset="-120"/>
               </a:rPr>
-              <a:t>103</a:t>
+              <a:t>104</a:t>
             </a:r>
             <a:endParaRPr lang="en-US" sz="3800" dirty="0"/>
           </a:p>

--- a/ARAH-System-Overview.pptx
+++ b/ARAH-System-Overview.pptx
@@ -14412,7 +14412,7 @@
                 <a:ea typeface="Consolas" pitchFamily="34" charset="-122"/>
                 <a:cs typeface="Consolas" pitchFamily="34" charset="-120"/>
               </a:rPr>
-              <a:t>359</a:t>
+              <a:t>370</a:t>
             </a:r>
             <a:endParaRPr lang="en-US" sz="3800" dirty="0"/>
           </a:p>
@@ -14672,7 +14672,7 @@
                 <a:ea typeface="Consolas" pitchFamily="34" charset="-122"/>
                 <a:cs typeface="Consolas" pitchFamily="34" charset="-120"/>
               </a:rPr>
-              <a:t>104</a:t>
+              <a:t>106</a:t>
             </a:r>
             <a:endParaRPr lang="en-US" sz="3800" dirty="0"/>
           </a:p>
@@ -15424,7 +15424,7 @@
                 <a:ea typeface="Calibri" pitchFamily="34" charset="-122"/>
                 <a:cs typeface="Calibri" pitchFamily="34" charset="-120"/>
               </a:rPr>
-              <a:t>Re-derive rather than trust: npm test · python -m pytest · ls supabase/migrations/*.sql. 372 JavaScript tests are defined; 359 run without production credentials.</a:t>
+              <a:t>Re-derive rather than trust: npm test · python -m pytest · ls supabase/migrations/*.sql. 382 JavaScript tests are defined; 370 run without production credentials.</a:t>
             </a:r>
             <a:endParaRPr lang="en-US" sz="1050" dirty="0"/>
           </a:p>
@@ -23660,7 +23660,7 @@
                 <a:ea typeface="Calibri" pitchFamily="34" charset="-122"/>
                 <a:cs typeface="Calibri" pitchFamily="34" charset="-120"/>
               </a:rPr>
-              <a:t>372 JavaScript tests and 36 Python tests; 13 of them need production credentials.</a:t>
+              <a:t>382 JavaScript tests and 36 Python tests; 12 of them need production credentials.</a:t>
             </a:r>
             <a:endParaRPr lang="en-US" sz="1100" dirty="0"/>
           </a:p>

--- a/ARAH-System-Overview.pptx
+++ b/ARAH-System-Overview.pptx
@@ -9426,7 +9426,7 @@
       </p:sp>
       <p:pic>
         <p:nvPicPr>
-          <p:cNvPr id="7" name="Image 0" descr="E:\Barang Barang\.PersonalWork\Freelance\Nuha\arah\arah\decks\assets\15-algorithm-tester.crop.png">    </p:cNvPr>
+          <p:cNvPr id="7" name="Image 0" descr="/admin/algorithm-tester — posted to the live ML service, nothing stored">    </p:cNvPr>
           <p:cNvPicPr>
             <a:picLocks noChangeAspect="1"/>
           </p:cNvPicPr>
@@ -12439,7 +12439,7 @@
       </p:sp>
       <p:pic>
         <p:nvPicPr>
-          <p:cNvPr id="31" name="Image 0" descr="E:\Barang Barang\.PersonalWork\Freelance\Nuha\arah\arah\decks\assets\08-field-suppressed.crop.png">    </p:cNvPr>
+          <p:cNvPr id="31" name="Image 0" descr="/explore/humanities-social-sciences — 7 students, so nothing is published">    </p:cNvPr>
           <p:cNvPicPr>
             <a:picLocks noChangeAspect="1"/>
           </p:cNvPicPr>
@@ -13737,7 +13737,7 @@
       </p:sp>
       <p:pic>
         <p:nvPicPr>
-          <p:cNvPr id="31" name="Image 0" descr="E:\Barang Barang\.PersonalWork\Freelance\Nuha\arah\arah\decks\assets\12-admin-response-charts.crop.png">    </p:cNvPr>
+          <p:cNvPr id="31" name="Image 0" descr="/admin/response-charts">    </p:cNvPr>
           <p:cNvPicPr>
             <a:picLocks noChangeAspect="1"/>
           </p:cNvPicPr>
@@ -18858,7 +18858,7 @@
       </p:sp>
       <p:pic>
         <p:nvPicPr>
-          <p:cNvPr id="19" name="Image 0" descr="E:\Barang Barang\.PersonalWork\Freelance\Nuha\arah\arah\decks\assets\01-landing.crop.png">    </p:cNvPr>
+          <p:cNvPr id="19" name="Image 0" descr="arah-sand.vercel.app">    </p:cNvPr>
           <p:cNvPicPr>
             <a:picLocks noChangeAspect="1"/>
           </p:cNvPicPr>
@@ -20453,7 +20453,7 @@
       </p:sp>
       <p:pic>
         <p:nvPicPr>
-          <p:cNvPr id="27" name="Image 0" descr="E:\Barang Barang\.PersonalWork\Freelance\Nuha\arah\arah\decks\assets\04-results-top.crop.png">    </p:cNvPr>
+          <p:cNvPr id="27" name="Image 0" descr="A stored result — /results/&lt;id&gt;, never recomputed">    </p:cNvPr>
           <p:cNvPicPr>
             <a:picLocks noChangeAspect="1"/>
           </p:cNvPicPr>
@@ -22134,7 +22134,7 @@
       </p:sp>
       <p:pic>
         <p:nvPicPr>
-          <p:cNvPr id="40" name="Image 0" descr="E:\Barang Barang\.PersonalWork\Freelance\Nuha\arah\arah\decks\assets\13-admin-survey-data.crop.png">    </p:cNvPr>
+          <p:cNvPr id="40" name="Image 0" descr="/admin/survey-data — the corpus the model reads">    </p:cNvPr>
           <p:cNvPicPr>
             <a:picLocks noChangeAspect="1"/>
           </p:cNvPicPr>
